--- a/docs/BioLink_Final_Presentation.pptx
+++ b/docs/BioLink_Final_Presentation.pptx
@@ -3277,7 +3277,7 @@
               </a:defRPr>
             </a:pPr>
             <a:r>
-              <a:t>Dustin Haggett  |  Kera Prosper  |  Esume</a:t>
+              <a:t>Dustin Haggett  |  Kera Prosper  |  Mia Braun</a:t>
             </a:r>
           </a:p>
         </p:txBody>
